--- a/public/pitch-decks/enterprise/pptx/69-privacy-impact-assessment.pptx
+++ b/public/pitch-decks/enterprise/pptx/69-privacy-impact-assessment.pptx
@@ -1814,7 +1814,7 @@
                   <a:srgbClr val="FFFFFF"/>
                 </a:solidFill>
               </a:rPr>
-              <a:t>Privacy Impact Assessment &amp; Capital Markets</a:t>
+              <a:t/>
             </a:r>
             <a:endParaRPr lang="en-US" sz="3600" dirty="0"/>
           </a:p>
@@ -1850,7 +1850,7 @@
                   <a:srgbClr val="8B8FA3"/>
                 </a:solidFill>
               </a:rPr>
-              <a:t>AI Governance for Regulated Financial Institutions</a:t>
+              <a:t>Accountable AI workflows for Privacy Impact Assessment</a:t>
             </a:r>
             <a:endParaRPr lang="en-US" sz="1600" dirty="0"/>
           </a:p>
@@ -1913,7 +1913,7 @@
                   <a:srgbClr val="8B8FA3"/>
                 </a:solidFill>
               </a:rPr>
-              <a:t>Decision Crisis Immunization Infrastructure</a:t>
+              <a:t>Decision Evidence Infrastructure for AI Systems</a:t>
             </a:r>
             <a:endParaRPr lang="en-US" sz="1200" dirty="0"/>
           </a:p>
@@ -2161,7 +2161,7 @@
                   <a:srgbClr val="8B8FA3"/>
                 </a:solidFill>
               </a:rPr>
-              <a:t>AI Governance for Regulated Financial Institutions</a:t>
+              <a:t>Accountable AI workflows for Privacy Impact Assessment</a:t>
             </a:r>
             <a:endParaRPr lang="en-US" sz="1400" dirty="0"/>
           </a:p>
@@ -2683,7 +2683,7 @@
                   <a:srgbClr val="D4AF37"/>
                 </a:solidFill>
               </a:rPr>
-              <a:t>DORA</a:t>
+              <a:t>AI ADOPTION</a:t>
             </a:r>
             <a:endParaRPr lang="en-US" sz="2800" dirty="0"/>
           </a:p>
@@ -2719,7 +2719,7 @@
                   <a:srgbClr val="8B8FA3"/>
                 </a:solidFill>
               </a:rPr>
-              <a:t>Jan 2025 — AI Operational Resilience</a:t>
+              <a:t>Privacy Impact Assessment workflows are moving from pilot to production</a:t>
             </a:r>
             <a:endParaRPr lang="en-US" sz="1000" dirty="0"/>
           </a:p>
@@ -2781,7 +2781,7 @@
                   <a:srgbClr val="D4AF37"/>
                 </a:solidFill>
               </a:rPr>
-              <a:t>Basel III</a:t>
+              <a:t>ACCOUNTABILITY</a:t>
             </a:r>
             <a:endParaRPr lang="en-US" sz="2800" dirty="0"/>
           </a:p>
@@ -2817,7 +2817,7 @@
                   <a:srgbClr val="8B8FA3"/>
                 </a:solidFill>
               </a:rPr>
-              <a:t>Auditable Risk Models Required</a:t>
+              <a:t>Leaders need replayable evidence for every material decision</a:t>
             </a:r>
             <a:endParaRPr lang="en-US" sz="1000" dirty="0"/>
           </a:p>
@@ -2879,7 +2879,7 @@
                   <a:srgbClr val="D4AF37"/>
                 </a:solidFill>
               </a:rPr>
-              <a:t>MiFID II</a:t>
+              <a:t>EXECUTION</a:t>
             </a:r>
             <a:endParaRPr lang="en-US" sz="2800" dirty="0"/>
           </a:p>
@@ -2915,7 +2915,7 @@
                   <a:srgbClr val="8B8FA3"/>
                 </a:solidFill>
               </a:rPr>
-              <a:t>Full Audit Trail for Algo Trading</a:t>
+              <a:t>Operations need challenge, approval, and audit — not black boxes</a:t>
             </a:r>
             <a:endParaRPr lang="en-US" sz="1000" dirty="0"/>
           </a:p>
@@ -3013,7 +3013,7 @@
                   <a:srgbClr val="8B8FA3"/>
                 </a:solidFill>
               </a:rPr>
-              <a:t>AI Platforms w/ Crypto Decision Evidence</a:t>
+              <a:t>Platforms built around decision evidence by design</a:t>
             </a:r>
             <a:endParaRPr lang="en-US" sz="1000" dirty="0"/>
           </a:p>
@@ -3225,7 +3225,7 @@
                   <a:srgbClr val="FFFFFF"/>
                 </a:solidFill>
               </a:rPr>
-              <a:t>Banks Deploy AI Without Audit Trails</a:t>
+              <a:t>Organizations use AI in Privacy Impact Assessment without decision evidence</a:t>
             </a:r>
             <a:endParaRPr lang="en-US" sz="2400" dirty="0"/>
           </a:p>
@@ -3265,7 +3265,7 @@
                   <a:srgbClr val="8B8FA3"/>
                 </a:solidFill>
               </a:rPr>
-              <a:t>Credit decisions influenced by AI with no explainability for regulators</a:t>
+              <a:t>Teams automate recommendations, approvals, or exception handling with limited traceability</a:t>
             </a:r>
             <a:endParaRPr lang="en-US" sz="1300" dirty="0"/>
           </a:p>
@@ -3283,7 +3283,7 @@
                   <a:srgbClr val="8B8FA3"/>
                 </a:solidFill>
               </a:rPr>
-              <a:t>DORA requires operational resilience documentation for all AI systems by Jan 2025</a:t>
+              <a:t>AI ADOPTION</a:t>
             </a:r>
             <a:endParaRPr lang="en-US" sz="1300" dirty="0"/>
           </a:p>
@@ -3301,7 +3301,7 @@
                   <a:srgbClr val="8B8FA3"/>
                 </a:solidFill>
               </a:rPr>
-              <a:t>Basel III mandates auditable risk models — AI black boxes fail this test</a:t>
+              <a:t>ACCOUNTABILITY</a:t>
             </a:r>
             <a:endParaRPr lang="en-US" sz="1300" dirty="0"/>
           </a:p>
@@ -3319,7 +3319,7 @@
                   <a:srgbClr val="8B8FA3"/>
                 </a:solidFill>
               </a:rPr>
-              <a:t>MiFID II requires full audit trails for algorithmic trading decisions</a:t>
+              <a:t>EXECUTION</a:t>
             </a:r>
             <a:endParaRPr lang="en-US" sz="1300" dirty="0"/>
           </a:p>
@@ -3337,7 +3337,7 @@
                   <a:srgbClr val="8B8FA3"/>
                 </a:solidFill>
               </a:rPr>
-              <a:t>No existing platform provides cryptographic proof of AI-assisted decisions</a:t>
+              <a:t>The result: slower adoption, higher exposure, and no clean audit trail for high-stakes decisions</a:t>
             </a:r>
             <a:endParaRPr lang="en-US" sz="1300" dirty="0"/>
           </a:p>
@@ -3588,7 +3588,7 @@
                   <a:srgbClr val="8B8FA3"/>
                 </a:solidFill>
               </a:rPr>
-              <a:t>Multi-agent deliberation with cryptographic evidence for every credit, trading, and risk decision — regulator-ready proof before the auditor calls.</a:t>
+              <a:t>Multi-agent deliberation with cryptographic evidence for every privacy impact assessment decision — review-ready before the committee, customer, or regulator asks.</a:t>
             </a:r>
             <a:endParaRPr lang="en-US" sz="1300" dirty="0"/>
           </a:p>
@@ -3690,7 +3690,7 @@
                   <a:srgbClr val="8B8FA3"/>
                 </a:solidFill>
               </a:rPr>
-              <a:t>Credit decision review with dissent tracking</a:t>
+              <a:t>Security and risk review with preserved reasoning and approvals</a:t>
             </a:r>
             <a:endParaRPr lang="en-US" sz="1100" dirty="0"/>
           </a:p>
@@ -3708,7 +3708,7 @@
                   <a:srgbClr val="8B8FA3"/>
                 </a:solidFill>
               </a:rPr>
-              <a:t>M&amp;A due diligence with full evidence trail</a:t>
+              <a:t>Exception handling for controls, alerts, and policy breaches</a:t>
             </a:r>
             <a:endParaRPr lang="en-US" sz="1100" dirty="0"/>
           </a:p>
@@ -3726,7 +3726,7 @@
                   <a:srgbClr val="8B8FA3"/>
                 </a:solidFill>
               </a:rPr>
-              <a:t>DORA compliance with automated evidence</a:t>
+              <a:t>AI ADOPTION</a:t>
             </a:r>
             <a:endParaRPr lang="en-US" sz="1100" dirty="0"/>
           </a:p>
@@ -3744,7 +3744,7 @@
                   <a:srgbClr val="8B8FA3"/>
                 </a:solidFill>
               </a:rPr>
-              <a:t>Investment committee structured deliberation</a:t>
+              <a:t>Model and workflow governance before production release</a:t>
             </a:r>
             <a:endParaRPr lang="en-US" sz="1100" dirty="0"/>
           </a:p>
@@ -3762,7 +3762,7 @@
                   <a:srgbClr val="8B8FA3"/>
                 </a:solidFill>
               </a:rPr>
-              <a:t>Regulatory change mapping to P&amp;L impact</a:t>
+              <a:t>Board, regulator, and customer reporting with exportable packets</a:t>
             </a:r>
             <a:endParaRPr lang="en-US" sz="1100" dirty="0"/>
           </a:p>
@@ -3938,7 +3938,7 @@
                   <a:srgbClr val="D4AF37"/>
                 </a:solidFill>
               </a:rPr>
-              <a:t>INVESTOR THESIS</a:t>
+              <a:t>WHY THIS USE CASE</a:t>
             </a:r>
             <a:endParaRPr lang="en-US" sz="1100" dirty="0"/>
           </a:p>
@@ -3974,7 +3974,7 @@
                   <a:srgbClr val="FFFFFF"/>
                 </a:solidFill>
               </a:rPr>
-              <a:t>Why This Is a Compelling Investment</a:t>
+              <a:t>Why Privacy Impact Assessment Matters</a:t>
             </a:r>
             <a:endParaRPr lang="en-US" sz="2400" dirty="0"/>
           </a:p>
@@ -4013,7 +4013,7 @@
                   <a:srgbClr val="8B8FA3"/>
                 </a:solidFill>
               </a:rPr>
-              <a:t>Privacy Impact Assessment is the largest regulated vertical. DORA enforcement creates immediate demand. Only platform providing cryptographic decision evidence — a regulatory requirement with zero incumbent solutions.</a:t>
+              <a:t>AI ADOPTION</a:t>
             </a:r>
             <a:endParaRPr lang="en-US" sz="1300" dirty="0"/>
           </a:p>
@@ -4630,7 +4630,7 @@
                   <a:srgbClr val="8B8FA3"/>
                 </a:solidFill>
               </a:rPr>
-              <a:t>Built the exact data infrastructure that financial institutions need for AI governance — at one of the world's largest asset managers.</a:t>
+              <a:t>Built the data infrastructure and decision workflows required for regulated, high-stakes AI deployments at institutional scale.</a:t>
             </a:r>
             <a:endParaRPr lang="en-US" sz="1200" dirty="0"/>
           </a:p>
@@ -5044,7 +5044,7 @@
                   <a:srgbClr val="8B8FA3"/>
                 </a:solidFill>
               </a:rPr>
-              <a:t>2 warm enterprise intros (financial institution, Big 4 channel). NVIDIA Inception.</a:t>
+              <a:t>Active enterprise design-partner conversations (financial institution, Big 4 channel). NVIDIA Inception.</a:t>
             </a:r>
             <a:endParaRPr lang="en-US" sz="1100" dirty="0"/>
           </a:p>
@@ -5145,7 +5145,7 @@
                   <a:srgbClr val="8B8FA3"/>
                 </a:solidFill>
               </a:rPr>
-              <a:t>GTM hiring, SOC 2 Type II certification, first enterprise pilots.</a:t>
+              <a:t>First 3 design partners signed, SOC 2 Type II certification, regulatory validation (EU AI Act compliance audit).</a:t>
             </a:r>
             <a:endParaRPr lang="en-US" sz="1100" dirty="0"/>
           </a:p>
